--- a/Youtube Channel Growth Analysis.pptx
+++ b/Youtube Channel Growth Analysis.pptx
@@ -21,10 +21,11 @@
     <p:sldId id="278" r:id="rId15"/>
     <p:sldId id="289" r:id="rId16"/>
     <p:sldId id="282" r:id="rId17"/>
-    <p:sldId id="283" r:id="rId18"/>
-    <p:sldId id="284" r:id="rId19"/>
-    <p:sldId id="271" r:id="rId20"/>
-    <p:sldId id="286" r:id="rId21"/>
+    <p:sldId id="290" r:id="rId18"/>
+    <p:sldId id="283" r:id="rId19"/>
+    <p:sldId id="284" r:id="rId20"/>
+    <p:sldId id="271" r:id="rId21"/>
+    <p:sldId id="286" r:id="rId22"/>
   </p:sldIdLst>
   <p:sldSz cx="12192000" cy="6858000"/>
   <p:notesSz cx="6858000" cy="9144000"/>
@@ -328,7 +329,7 @@
             <a:fld id="{B61BEF0D-F0BB-DE4B-95CE-6DB70DBA9567}" type="datetimeFigureOut">
               <a:rPr lang="en-US" smtClean="0"/>
               <a:pPr/>
-              <a:t>3/4/2026</a:t>
+              <a:t>3/7/2026</a:t>
             </a:fld>
             <a:endParaRPr lang="en-US" dirty="0"/>
           </a:p>
@@ -628,7 +629,7 @@
             <a:fld id="{B61BEF0D-F0BB-DE4B-95CE-6DB70DBA9567}" type="datetimeFigureOut">
               <a:rPr lang="en-US" smtClean="0"/>
               <a:pPr/>
-              <a:t>3/4/2026</a:t>
+              <a:t>3/7/2026</a:t>
             </a:fld>
             <a:endParaRPr lang="en-US" dirty="0"/>
           </a:p>
@@ -822,7 +823,7 @@
             <a:fld id="{B61BEF0D-F0BB-DE4B-95CE-6DB70DBA9567}" type="datetimeFigureOut">
               <a:rPr lang="en-US" smtClean="0"/>
               <a:pPr/>
-              <a:t>3/4/2026</a:t>
+              <a:t>3/7/2026</a:t>
             </a:fld>
             <a:endParaRPr lang="en-US" dirty="0"/>
           </a:p>
@@ -1085,7 +1086,7 @@
             <a:fld id="{B61BEF0D-F0BB-DE4B-95CE-6DB70DBA9567}" type="datetimeFigureOut">
               <a:rPr lang="en-US" smtClean="0"/>
               <a:pPr/>
-              <a:t>3/4/2026</a:t>
+              <a:t>3/7/2026</a:t>
             </a:fld>
             <a:endParaRPr lang="en-US" dirty="0"/>
           </a:p>
@@ -1511,7 +1512,7 @@
             <a:fld id="{B61BEF0D-F0BB-DE4B-95CE-6DB70DBA9567}" type="datetimeFigureOut">
               <a:rPr lang="en-US" smtClean="0"/>
               <a:pPr/>
-              <a:t>3/4/2026</a:t>
+              <a:t>3/7/2026</a:t>
             </a:fld>
             <a:endParaRPr lang="en-US" dirty="0"/>
           </a:p>
@@ -2050,7 +2051,7 @@
             <a:fld id="{B61BEF0D-F0BB-DE4B-95CE-6DB70DBA9567}" type="datetimeFigureOut">
               <a:rPr lang="en-US" smtClean="0"/>
               <a:pPr/>
-              <a:t>3/4/2026</a:t>
+              <a:t>3/7/2026</a:t>
             </a:fld>
             <a:endParaRPr lang="en-US" dirty="0"/>
           </a:p>
@@ -2916,7 +2917,7 @@
             <a:fld id="{B61BEF0D-F0BB-DE4B-95CE-6DB70DBA9567}" type="datetimeFigureOut">
               <a:rPr lang="en-US" smtClean="0"/>
               <a:pPr/>
-              <a:t>3/4/2026</a:t>
+              <a:t>3/7/2026</a:t>
             </a:fld>
             <a:endParaRPr lang="en-US" dirty="0"/>
           </a:p>
@@ -3088,7 +3089,7 @@
             <a:fld id="{B61BEF0D-F0BB-DE4B-95CE-6DB70DBA9567}" type="datetimeFigureOut">
               <a:rPr lang="en-US" smtClean="0"/>
               <a:pPr/>
-              <a:t>3/4/2026</a:t>
+              <a:t>3/7/2026</a:t>
             </a:fld>
             <a:endParaRPr lang="en-US" dirty="0"/>
           </a:p>
@@ -3274,7 +3275,7 @@
             <a:fld id="{B61BEF0D-F0BB-DE4B-95CE-6DB70DBA9567}" type="datetimeFigureOut">
               <a:rPr lang="en-US" smtClean="0"/>
               <a:pPr/>
-              <a:t>3/4/2026</a:t>
+              <a:t>3/7/2026</a:t>
             </a:fld>
             <a:endParaRPr lang="en-US" dirty="0"/>
           </a:p>
@@ -3446,7 +3447,7 @@
             <a:fld id="{B61BEF0D-F0BB-DE4B-95CE-6DB70DBA9567}" type="datetimeFigureOut">
               <a:rPr lang="en-US" smtClean="0"/>
               <a:pPr/>
-              <a:t>3/4/2026</a:t>
+              <a:t>3/7/2026</a:t>
             </a:fld>
             <a:endParaRPr lang="en-US" dirty="0"/>
           </a:p>
@@ -3692,7 +3693,7 @@
             <a:fld id="{B61BEF0D-F0BB-DE4B-95CE-6DB70DBA9567}" type="datetimeFigureOut">
               <a:rPr lang="en-US" smtClean="0"/>
               <a:pPr/>
-              <a:t>3/4/2026</a:t>
+              <a:t>3/7/2026</a:t>
             </a:fld>
             <a:endParaRPr lang="en-US" dirty="0"/>
           </a:p>
@@ -3930,7 +3931,7 @@
             <a:fld id="{B61BEF0D-F0BB-DE4B-95CE-6DB70DBA9567}" type="datetimeFigureOut">
               <a:rPr lang="en-US" smtClean="0"/>
               <a:pPr/>
-              <a:t>3/4/2026</a:t>
+              <a:t>3/7/2026</a:t>
             </a:fld>
             <a:endParaRPr lang="en-US" dirty="0"/>
           </a:p>
@@ -4398,7 +4399,7 @@
             <a:fld id="{B61BEF0D-F0BB-DE4B-95CE-6DB70DBA9567}" type="datetimeFigureOut">
               <a:rPr lang="en-US" smtClean="0"/>
               <a:pPr/>
-              <a:t>3/4/2026</a:t>
+              <a:t>3/7/2026</a:t>
             </a:fld>
             <a:endParaRPr lang="en-US" dirty="0"/>
           </a:p>
@@ -4518,7 +4519,7 @@
             <a:fld id="{B61BEF0D-F0BB-DE4B-95CE-6DB70DBA9567}" type="datetimeFigureOut">
               <a:rPr lang="en-US" smtClean="0"/>
               <a:pPr/>
-              <a:t>3/4/2026</a:t>
+              <a:t>3/7/2026</a:t>
             </a:fld>
             <a:endParaRPr lang="en-US" dirty="0"/>
           </a:p>
@@ -4615,7 +4616,7 @@
             <a:fld id="{B61BEF0D-F0BB-DE4B-95CE-6DB70DBA9567}" type="datetimeFigureOut">
               <a:rPr lang="en-US" smtClean="0"/>
               <a:pPr/>
-              <a:t>3/4/2026</a:t>
+              <a:t>3/7/2026</a:t>
             </a:fld>
             <a:endParaRPr lang="en-US" dirty="0"/>
           </a:p>
@@ -4872,7 +4873,7 @@
             <a:fld id="{B61BEF0D-F0BB-DE4B-95CE-6DB70DBA9567}" type="datetimeFigureOut">
               <a:rPr lang="en-US" smtClean="0"/>
               <a:pPr/>
-              <a:t>3/4/2026</a:t>
+              <a:t>3/7/2026</a:t>
             </a:fld>
             <a:endParaRPr lang="en-US" dirty="0"/>
           </a:p>
@@ -5174,7 +5175,7 @@
             <a:fld id="{B61BEF0D-F0BB-DE4B-95CE-6DB70DBA9567}" type="datetimeFigureOut">
               <a:rPr lang="en-US" smtClean="0"/>
               <a:pPr/>
-              <a:t>3/4/2026</a:t>
+              <a:t>3/7/2026</a:t>
             </a:fld>
             <a:endParaRPr lang="en-US" dirty="0"/>
           </a:p>
@@ -5410,7 +5411,7 @@
             <a:fld id="{B61BEF0D-F0BB-DE4B-95CE-6DB70DBA9567}" type="datetimeFigureOut">
               <a:rPr lang="en-US" smtClean="0"/>
               <a:pPr/>
-              <a:t>3/4/2026</a:t>
+              <a:t>3/7/2026</a:t>
             </a:fld>
             <a:endParaRPr lang="en-US" dirty="0"/>
           </a:p>
@@ -6280,12 +6281,20 @@
               </a:lnSpc>
             </a:pPr>
             <a:r>
-              <a:rPr lang="en-US" sz="2000" dirty="0" err="1">
+              <a:rPr lang="en-US" sz="2000" dirty="0">
                 <a:solidFill>
                   <a:schemeClr val="tx1"/>
                 </a:solidFill>
               </a:rPr>
-              <a:t>Dax</a:t>
+              <a:t>Dax is called as </a:t>
+            </a:r>
+            <a:r>
+              <a:rPr lang="en-US" sz="2000">
+                <a:solidFill>
+                  <a:schemeClr val="tx1"/>
+                </a:solidFill>
+              </a:rPr>
+              <a:t>Data Analysis </a:t>
             </a:r>
             <a:r>
               <a:rPr lang="en-US" sz="2000" dirty="0">
@@ -6293,7 +6302,7 @@
                   <a:schemeClr val="tx1"/>
                 </a:solidFill>
               </a:rPr>
-              <a:t> is called as Data Analytic Expression.</a:t>
+              <a:t>Expression.</a:t>
             </a:r>
           </a:p>
           <a:p>
@@ -6571,44 +6580,21 @@
           </a:p>
         </p:txBody>
       </p:sp>
-      <p:sp>
-        <p:nvSpPr>
-          <p:cNvPr id="4" name="Content Placeholder 3">
+      <p:pic>
+        <p:nvPicPr>
+          <p:cNvPr id="5" name="Content Placeholder 4">
             <a:extLst>
               <a:ext uri="{FF2B5EF4-FFF2-40B4-BE49-F238E27FC236}">
-                <a16:creationId xmlns:a16="http://schemas.microsoft.com/office/drawing/2014/main" id="{D993F640-859B-2C90-548D-5BC328617984}"/>
-              </a:ext>
-            </a:extLst>
-          </p:cNvPr>
-          <p:cNvSpPr>
-            <a:spLocks noGrp="1"/>
-          </p:cNvSpPr>
-          <p:nvPr>
-            <p:ph idx="1"/>
-          </p:nvPr>
-        </p:nvSpPr>
-        <p:spPr/>
-        <p:txBody>
-          <a:bodyPr/>
-          <a:lstStyle/>
-          <a:p>
-            <a:endParaRPr lang="en-IN"/>
-          </a:p>
-        </p:txBody>
-      </p:sp>
-      <p:pic>
-        <p:nvPicPr>
-          <p:cNvPr id="6" name="Picture 5">
-            <a:extLst>
-              <a:ext uri="{FF2B5EF4-FFF2-40B4-BE49-F238E27FC236}">
-                <a16:creationId xmlns:a16="http://schemas.microsoft.com/office/drawing/2014/main" id="{CBEA006F-1A65-8E53-969F-2635A6FEB544}"/>
+                <a16:creationId xmlns:a16="http://schemas.microsoft.com/office/drawing/2014/main" id="{C6797413-AB47-4742-B577-464F77DCC9BE}"/>
               </a:ext>
             </a:extLst>
           </p:cNvPr>
           <p:cNvPicPr>
-            <a:picLocks noChangeAspect="1"/>
+            <a:picLocks noGrp="1" noChangeAspect="1"/>
           </p:cNvPicPr>
-          <p:nvPr/>
+          <p:nvPr>
+            <p:ph idx="1"/>
+          </p:nvPr>
         </p:nvPicPr>
         <p:blipFill>
           <a:blip r:embed="rId2"/>
@@ -6618,12 +6604,9 @@
         </p:blipFill>
         <p:spPr>
           <a:xfrm>
-            <a:off x="584462" y="1278083"/>
-            <a:ext cx="10693743" cy="5278580"/>
+            <a:off x="780837" y="1278083"/>
+            <a:ext cx="10921428" cy="5354587"/>
           </a:xfrm>
-          <a:prstGeom prst="rect">
-            <a:avLst/>
-          </a:prstGeom>
         </p:spPr>
       </p:pic>
     </p:spTree>
@@ -6718,7 +6701,13 @@
       </p:sp>
       <p:pic>
         <p:nvPicPr>
-          <p:cNvPr id="4" name="Picture 3" descr="7b7a07e7-5bf6-4612-9c0e-58c0d31d37f9.jpg"/>
+          <p:cNvPr id="3" name="Picture 2">
+            <a:extLst>
+              <a:ext uri="{FF2B5EF4-FFF2-40B4-BE49-F238E27FC236}">
+                <a16:creationId xmlns:a16="http://schemas.microsoft.com/office/drawing/2014/main" id="{A237F4C2-158D-4E5A-B0EA-C2C62B00D84E}"/>
+              </a:ext>
+            </a:extLst>
+          </p:cNvPr>
           <p:cNvPicPr>
             <a:picLocks noChangeAspect="1"/>
           </p:cNvPicPr>
@@ -6732,8 +6721,8 @@
         </p:blipFill>
         <p:spPr>
           <a:xfrm>
-            <a:off x="762166" y="604911"/>
-            <a:ext cx="11012493" cy="5873188"/>
+            <a:off x="530472" y="464658"/>
+            <a:ext cx="11131055" cy="5928684"/>
           </a:xfrm>
           <a:prstGeom prst="rect">
             <a:avLst/>
@@ -7290,12 +7279,67 @@
           </a:p>
         </p:txBody>
       </p:sp>
+      <p:sp>
+        <p:nvSpPr>
+          <p:cNvPr id="7" name="Rectangle 6"/>
+          <p:cNvSpPr/>
+          <p:nvPr/>
+        </p:nvSpPr>
+        <p:spPr>
+          <a:xfrm>
+            <a:off x="464234" y="2551837"/>
+            <a:ext cx="6076730" cy="1754326"/>
+          </a:xfrm>
+          <a:prstGeom prst="rect">
+            <a:avLst/>
+          </a:prstGeom>
+        </p:spPr>
+        <p:txBody>
+          <a:bodyPr wrap="square">
+            <a:spAutoFit/>
+          </a:bodyPr>
+          <a:lstStyle/>
+          <a:p>
+            <a:pPr>
+              <a:lnSpc>
+                <a:spcPct val="150000"/>
+              </a:lnSpc>
+            </a:pPr>
+            <a:r>
+              <a:rPr lang="en-IN" dirty="0"/>
+              <a:t> Stacked column chart→ horizontal bars are easier to read, it gives quick comparison across Months.</a:t>
+            </a:r>
+          </a:p>
+          <a:p>
+            <a:pPr>
+              <a:lnSpc>
+                <a:spcPct val="150000"/>
+              </a:lnSpc>
+            </a:pPr>
+            <a:r>
+              <a:rPr lang="en-IN" dirty="0"/>
+              <a:t>Y axis: Month Name</a:t>
+            </a:r>
+          </a:p>
+          <a:p>
+            <a:pPr>
+              <a:lnSpc>
+                <a:spcPct val="150000"/>
+              </a:lnSpc>
+            </a:pPr>
+            <a:r>
+              <a:rPr lang="en-IN" dirty="0"/>
+              <a:t>X axis:  Total  Views </a:t>
+            </a:r>
+          </a:p>
+        </p:txBody>
+      </p:sp>
       <p:pic>
         <p:nvPicPr>
-          <p:cNvPr id="18" name="Picture 17">
+          <p:cNvPr id="10" name="Picture 9">
             <a:extLst>
               <a:ext uri="{FF2B5EF4-FFF2-40B4-BE49-F238E27FC236}">
-                <a16:creationId xmlns:a16="http://schemas.microsoft.com/office/drawing/2014/main" id="{E5364A1B-AAB0-25AD-520E-5FEF2C9BE4A1}"/>
+                <a16:creationId xmlns:a16="http://schemas.microsoft.com/office/drawing/2014/main" id="{5BF94428-0870-4FF2-9693-622B32269BC8}"/>
               </a:ext>
             </a:extLst>
           </p:cNvPr>
@@ -7312,69 +7356,14 @@
         </p:blipFill>
         <p:spPr>
           <a:xfrm>
-            <a:off x="6690197" y="1293065"/>
-            <a:ext cx="5187576" cy="4271870"/>
+            <a:off x="6626928" y="1150707"/>
+            <a:ext cx="5383561" cy="3949612"/>
           </a:xfrm>
           <a:prstGeom prst="rect">
             <a:avLst/>
           </a:prstGeom>
         </p:spPr>
       </p:pic>
-      <p:sp>
-        <p:nvSpPr>
-          <p:cNvPr id="7" name="Rectangle 6"/>
-          <p:cNvSpPr/>
-          <p:nvPr/>
-        </p:nvSpPr>
-        <p:spPr>
-          <a:xfrm>
-            <a:off x="464234" y="2551837"/>
-            <a:ext cx="6076730" cy="1754326"/>
-          </a:xfrm>
-          <a:prstGeom prst="rect">
-            <a:avLst/>
-          </a:prstGeom>
-        </p:spPr>
-        <p:txBody>
-          <a:bodyPr wrap="square">
-            <a:spAutoFit/>
-          </a:bodyPr>
-          <a:lstStyle/>
-          <a:p>
-            <a:pPr>
-              <a:lnSpc>
-                <a:spcPct val="150000"/>
-              </a:lnSpc>
-            </a:pPr>
-            <a:r>
-              <a:rPr lang="en-IN" dirty="0"/>
-              <a:t> Stacked column chart→ horizontal bars are easier to read, it gives quick comparison across Months.</a:t>
-            </a:r>
-          </a:p>
-          <a:p>
-            <a:pPr>
-              <a:lnSpc>
-                <a:spcPct val="150000"/>
-              </a:lnSpc>
-            </a:pPr>
-            <a:r>
-              <a:rPr lang="en-IN" dirty="0"/>
-              <a:t>Y axis: Month</a:t>
-            </a:r>
-          </a:p>
-          <a:p>
-            <a:pPr>
-              <a:lnSpc>
-                <a:spcPct val="150000"/>
-              </a:lnSpc>
-            </a:pPr>
-            <a:r>
-              <a:rPr lang="en-IN" dirty="0"/>
-              <a:t>X axis:  Total  Views </a:t>
-            </a:r>
-          </a:p>
-        </p:txBody>
-      </p:sp>
     </p:spTree>
     <p:extLst>
       <p:ext uri="{BB962C8B-B14F-4D97-AF65-F5344CB8AC3E}">
@@ -7830,12 +7819,89 @@
           </a:p>
         </p:txBody>
       </p:sp>
+      <p:sp>
+        <p:nvSpPr>
+          <p:cNvPr id="5" name="Rectangle 4"/>
+          <p:cNvSpPr/>
+          <p:nvPr/>
+        </p:nvSpPr>
+        <p:spPr>
+          <a:xfrm>
+            <a:off x="984738" y="2551837"/>
+            <a:ext cx="5387927" cy="1754326"/>
+          </a:xfrm>
+          <a:prstGeom prst="rect">
+            <a:avLst/>
+          </a:prstGeom>
+        </p:spPr>
+        <p:txBody>
+          <a:bodyPr wrap="square">
+            <a:spAutoFit/>
+          </a:bodyPr>
+          <a:lstStyle/>
+          <a:p>
+            <a:pPr indent="-342900">
+              <a:lnSpc>
+                <a:spcPct val="150000"/>
+              </a:lnSpc>
+              <a:buFont typeface="Arial" panose="020B0604020202020204" pitchFamily="34" charset="0"/>
+              <a:buChar char="•"/>
+            </a:pPr>
+            <a:r>
+              <a:rPr lang="en-IN" b="1" dirty="0"/>
+              <a:t>Donut</a:t>
+            </a:r>
+            <a:r>
+              <a:rPr lang="en-IN" b="1" dirty="0">
+                <a:solidFill>
+                  <a:srgbClr val="FF0000"/>
+                </a:solidFill>
+              </a:rPr>
+              <a:t> </a:t>
+            </a:r>
+            <a:r>
+              <a:rPr lang="en-IN" b="1" dirty="0"/>
+              <a:t>chart</a:t>
+            </a:r>
+            <a:r>
+              <a:rPr lang="en-IN" dirty="0"/>
+              <a:t>→ Show each channel’s contribution to total views.</a:t>
+            </a:r>
+          </a:p>
+          <a:p>
+            <a:pPr indent="-342900">
+              <a:lnSpc>
+                <a:spcPct val="150000"/>
+              </a:lnSpc>
+              <a:buFont typeface="Arial" panose="020B0604020202020204" pitchFamily="34" charset="0"/>
+              <a:buChar char="•"/>
+            </a:pPr>
+            <a:r>
+              <a:rPr lang="en-IN" dirty="0"/>
+              <a:t>Legend: Channel title</a:t>
+            </a:r>
+          </a:p>
+          <a:p>
+            <a:pPr indent="-342900">
+              <a:lnSpc>
+                <a:spcPct val="150000"/>
+              </a:lnSpc>
+              <a:buFont typeface="Arial" panose="020B0604020202020204" pitchFamily="34" charset="0"/>
+              <a:buChar char="•"/>
+            </a:pPr>
+            <a:r>
+              <a:rPr lang="en-IN" dirty="0"/>
+              <a:t>Values:  Sum of View count</a:t>
+            </a:r>
+          </a:p>
+        </p:txBody>
+      </p:sp>
       <p:pic>
         <p:nvPicPr>
-          <p:cNvPr id="10" name="Picture 9">
+          <p:cNvPr id="6" name="Picture 5">
             <a:extLst>
               <a:ext uri="{FF2B5EF4-FFF2-40B4-BE49-F238E27FC236}">
-                <a16:creationId xmlns:a16="http://schemas.microsoft.com/office/drawing/2014/main" id="{2DCE6B6F-448F-D0CA-F768-E964EEA10E8F}"/>
+                <a16:creationId xmlns:a16="http://schemas.microsoft.com/office/drawing/2014/main" id="{BF2678E5-7A1F-49A1-B0A4-3C20A02DA319}"/>
               </a:ext>
             </a:extLst>
           </p:cNvPr>
@@ -7852,91 +7918,14 @@
         </p:blipFill>
         <p:spPr>
           <a:xfrm>
-            <a:off x="7149739" y="1421089"/>
-            <a:ext cx="4957419" cy="3770723"/>
+            <a:off x="7130265" y="1363995"/>
+            <a:ext cx="4613097" cy="3464859"/>
           </a:xfrm>
           <a:prstGeom prst="rect">
             <a:avLst/>
           </a:prstGeom>
         </p:spPr>
       </p:pic>
-      <p:sp>
-        <p:nvSpPr>
-          <p:cNvPr id="5" name="Rectangle 4"/>
-          <p:cNvSpPr/>
-          <p:nvPr/>
-        </p:nvSpPr>
-        <p:spPr>
-          <a:xfrm>
-            <a:off x="984738" y="2551837"/>
-            <a:ext cx="5387927" cy="1754326"/>
-          </a:xfrm>
-          <a:prstGeom prst="rect">
-            <a:avLst/>
-          </a:prstGeom>
-        </p:spPr>
-        <p:txBody>
-          <a:bodyPr wrap="square">
-            <a:spAutoFit/>
-          </a:bodyPr>
-          <a:lstStyle/>
-          <a:p>
-            <a:pPr indent="-342900">
-              <a:lnSpc>
-                <a:spcPct val="150000"/>
-              </a:lnSpc>
-              <a:buFont typeface="Arial" panose="020B0604020202020204" pitchFamily="34" charset="0"/>
-              <a:buChar char="•"/>
-            </a:pPr>
-            <a:r>
-              <a:rPr lang="en-IN" b="1" dirty="0"/>
-              <a:t>Donut</a:t>
-            </a:r>
-            <a:r>
-              <a:rPr lang="en-IN" b="1" dirty="0">
-                <a:solidFill>
-                  <a:srgbClr val="FF0000"/>
-                </a:solidFill>
-              </a:rPr>
-              <a:t> </a:t>
-            </a:r>
-            <a:r>
-              <a:rPr lang="en-IN" b="1" dirty="0"/>
-              <a:t>chart</a:t>
-            </a:r>
-            <a:r>
-              <a:rPr lang="en-IN" dirty="0"/>
-              <a:t>→ Show each channel’s contribution to total views.</a:t>
-            </a:r>
-          </a:p>
-          <a:p>
-            <a:pPr indent="-342900">
-              <a:lnSpc>
-                <a:spcPct val="150000"/>
-              </a:lnSpc>
-              <a:buFont typeface="Arial" panose="020B0604020202020204" pitchFamily="34" charset="0"/>
-              <a:buChar char="•"/>
-            </a:pPr>
-            <a:r>
-              <a:rPr lang="en-IN" dirty="0"/>
-              <a:t>Legend: Channel title</a:t>
-            </a:r>
-          </a:p>
-          <a:p>
-            <a:pPr indent="-342900">
-              <a:lnSpc>
-                <a:spcPct val="150000"/>
-              </a:lnSpc>
-              <a:buFont typeface="Arial" panose="020B0604020202020204" pitchFamily="34" charset="0"/>
-              <a:buChar char="•"/>
-            </a:pPr>
-            <a:r>
-              <a:rPr lang="en-IN" dirty="0"/>
-              <a:t>Values:  Sum of View count</a:t>
-            </a:r>
-          </a:p>
-        </p:txBody>
-      </p:sp>
     </p:spTree>
     <p:extLst>
       <p:ext uri="{BB962C8B-B14F-4D97-AF65-F5344CB8AC3E}">
@@ -8470,10 +8459,10 @@
       </p:sp>
       <p:pic>
         <p:nvPicPr>
-          <p:cNvPr id="6" name="Picture 5">
+          <p:cNvPr id="7" name="Picture 6">
             <a:extLst>
               <a:ext uri="{FF2B5EF4-FFF2-40B4-BE49-F238E27FC236}">
-                <a16:creationId xmlns:a16="http://schemas.microsoft.com/office/drawing/2014/main" id="{A8D59598-F5DF-0A12-F77A-1158D6BA3125}"/>
+                <a16:creationId xmlns:a16="http://schemas.microsoft.com/office/drawing/2014/main" id="{D0CB7FAA-D9B1-4252-87EC-94134FA6D102}"/>
               </a:ext>
             </a:extLst>
           </p:cNvPr>
@@ -8490,8 +8479,8 @@
         </p:blipFill>
         <p:spPr>
           <a:xfrm>
-            <a:off x="7236692" y="1348033"/>
-            <a:ext cx="4955308" cy="3742316"/>
+            <a:off x="7172091" y="1294205"/>
+            <a:ext cx="4674011" cy="3709310"/>
           </a:xfrm>
           <a:prstGeom prst="rect">
             <a:avLst/>
@@ -8988,10 +8977,10 @@
       </p:sp>
       <p:pic>
         <p:nvPicPr>
-          <p:cNvPr id="5" name="Picture 4">
+          <p:cNvPr id="6" name="Picture 5">
             <a:extLst>
               <a:ext uri="{FF2B5EF4-FFF2-40B4-BE49-F238E27FC236}">
-                <a16:creationId xmlns:a16="http://schemas.microsoft.com/office/drawing/2014/main" id="{EC833C6C-F63C-5A59-6FE8-2538E4B4EEE1}"/>
+                <a16:creationId xmlns:a16="http://schemas.microsoft.com/office/drawing/2014/main" id="{98F8D81A-E96D-44CC-B930-B435E1E3CF97}"/>
               </a:ext>
             </a:extLst>
           </p:cNvPr>
@@ -9008,8 +8997,8 @@
         </p:blipFill>
         <p:spPr>
           <a:xfrm>
-            <a:off x="7160296" y="1131216"/>
-            <a:ext cx="4906014" cy="3892485"/>
+            <a:off x="7171362" y="970672"/>
+            <a:ext cx="4818579" cy="3724618"/>
           </a:xfrm>
           <a:prstGeom prst="rect">
             <a:avLst/>
@@ -9037,7 +9026,7 @@
         <p:cNvPr id="1" name="">
           <a:extLst>
             <a:ext uri="{FF2B5EF4-FFF2-40B4-BE49-F238E27FC236}">
-              <a16:creationId xmlns:a16="http://schemas.microsoft.com/office/drawing/2014/main" id="{83163398-240B-5847-E5C2-E8327D0C6279}"/>
+              <a16:creationId xmlns:a16="http://schemas.microsoft.com/office/drawing/2014/main" id="{F401EEB5-D785-E21F-DEB0-F786437773D0}"/>
             </a:ext>
           </a:extLst>
         </p:cNvPr>
@@ -9057,7 +9046,7 @@
           <p:cNvPr id="3" name="Title 1">
             <a:extLst>
               <a:ext uri="{FF2B5EF4-FFF2-40B4-BE49-F238E27FC236}">
-                <a16:creationId xmlns:a16="http://schemas.microsoft.com/office/drawing/2014/main" id="{F871A96B-C3B1-FCF1-2CAE-FA4C48F8B592}"/>
+                <a16:creationId xmlns:a16="http://schemas.microsoft.com/office/drawing/2014/main" id="{45EDB57A-F2DD-1DC5-3DC5-D11C95AB718E}"/>
               </a:ext>
             </a:extLst>
           </p:cNvPr>
@@ -9081,7 +9070,7 @@
           <a:lstStyle/>
           <a:p>
             <a:r>
-              <a:rPr lang="en-IN" b="1" dirty="0">
+              <a:rPr lang="en-US" b="1" dirty="0">
                 <a:solidFill>
                   <a:schemeClr val="accent6">
                     <a:lumMod val="60000"/>
@@ -9089,8 +9078,16 @@
                   </a:schemeClr>
                 </a:solidFill>
               </a:rPr>
-              <a:t>Top Channel by Total Comments</a:t>
-            </a:r>
+              <a:t>Highest and Lowest Total Like Across Channels</a:t>
+            </a:r>
+            <a:endParaRPr lang="en-IN" b="1" dirty="0">
+              <a:solidFill>
+                <a:schemeClr val="accent6">
+                  <a:lumMod val="60000"/>
+                  <a:lumOff val="40000"/>
+                </a:schemeClr>
+              </a:solidFill>
+            </a:endParaRPr>
           </a:p>
         </p:txBody>
       </p:sp>
@@ -9099,7 +9096,7 @@
           <p:cNvPr id="4" name="Text Placeholder 3">
             <a:extLst>
               <a:ext uri="{FF2B5EF4-FFF2-40B4-BE49-F238E27FC236}">
-                <a16:creationId xmlns:a16="http://schemas.microsoft.com/office/drawing/2014/main" id="{1775B6E5-6180-95A7-5344-1BA8647571D7}"/>
+                <a16:creationId xmlns:a16="http://schemas.microsoft.com/office/drawing/2014/main" id="{1936A830-69E1-6415-5522-087CEA2D3181}"/>
               </a:ext>
             </a:extLst>
           </p:cNvPr>
@@ -9471,7 +9468,7 @@
             </a:pPr>
             <a:r>
               <a:rPr lang="en-IN" b="1" dirty="0"/>
-              <a:t>Area chart→ This chart shows how many comments each channel got..</a:t>
+              <a:t>Stacked bar chart→ horizontal bars are easier to read, it gives quick comparison across categories.</a:t>
             </a:r>
           </a:p>
           <a:p>
@@ -9482,7 +9479,7 @@
             </a:pPr>
             <a:r>
               <a:rPr lang="en-IN" b="1" dirty="0"/>
-              <a:t>Y axis: Channel id</a:t>
+              <a:t>Y axis: Channel title</a:t>
             </a:r>
           </a:p>
           <a:p>
@@ -9493,7 +9490,7 @@
             </a:pPr>
             <a:r>
               <a:rPr lang="en-IN" b="1" dirty="0"/>
-              <a:t>X axis: Total Comments </a:t>
+              <a:t>X axis: Total Likes </a:t>
             </a:r>
           </a:p>
           <a:p>
@@ -9509,7 +9506,7 @@
           <p:cNvPr id="6" name="Picture 5">
             <a:extLst>
               <a:ext uri="{FF2B5EF4-FFF2-40B4-BE49-F238E27FC236}">
-                <a16:creationId xmlns:a16="http://schemas.microsoft.com/office/drawing/2014/main" id="{51CE0C20-4E3E-6EF5-688E-C6250A2D26A8}"/>
+                <a16:creationId xmlns:a16="http://schemas.microsoft.com/office/drawing/2014/main" id="{B2CF371A-BFF5-43C0-A3C3-760823059660}"/>
               </a:ext>
             </a:extLst>
           </p:cNvPr>
@@ -9526,8 +9523,8 @@
         </p:blipFill>
         <p:spPr>
           <a:xfrm>
-            <a:off x="7224221" y="1215736"/>
-            <a:ext cx="4898649" cy="3734291"/>
+            <a:off x="7304928" y="1215736"/>
+            <a:ext cx="4732665" cy="3880372"/>
           </a:xfrm>
           <a:prstGeom prst="rect">
             <a:avLst/>
@@ -9537,7 +9534,7 @@
     </p:spTree>
     <p:extLst>
       <p:ext uri="{BB962C8B-B14F-4D97-AF65-F5344CB8AC3E}">
-        <p14:creationId xmlns:p14="http://schemas.microsoft.com/office/powerpoint/2010/main" val="378101652"/>
+        <p14:creationId xmlns:p14="http://schemas.microsoft.com/office/powerpoint/2010/main" val="2949386375"/>
       </p:ext>
     </p:extLst>
   </p:cSld>
@@ -9555,7 +9552,7 @@
         <p:cNvPr id="1" name="">
           <a:extLst>
             <a:ext uri="{FF2B5EF4-FFF2-40B4-BE49-F238E27FC236}">
-              <a16:creationId xmlns:a16="http://schemas.microsoft.com/office/drawing/2014/main" id="{F401EEB5-D785-E21F-DEB0-F786437773D0}"/>
+              <a16:creationId xmlns:a16="http://schemas.microsoft.com/office/drawing/2014/main" id="{83163398-240B-5847-E5C2-E8327D0C6279}"/>
             </a:ext>
           </a:extLst>
         </p:cNvPr>
@@ -9575,7 +9572,7 @@
           <p:cNvPr id="3" name="Title 1">
             <a:extLst>
               <a:ext uri="{FF2B5EF4-FFF2-40B4-BE49-F238E27FC236}">
-                <a16:creationId xmlns:a16="http://schemas.microsoft.com/office/drawing/2014/main" id="{45EDB57A-F2DD-1DC5-3DC5-D11C95AB718E}"/>
+                <a16:creationId xmlns:a16="http://schemas.microsoft.com/office/drawing/2014/main" id="{F871A96B-C3B1-FCF1-2CAE-FA4C48F8B592}"/>
               </a:ext>
             </a:extLst>
           </p:cNvPr>
@@ -9607,7 +9604,7 @@
                   </a:schemeClr>
                 </a:solidFill>
               </a:rPr>
-              <a:t>Top-Performing Channel in terms of Comments</a:t>
+              <a:t>Top Channel by Total Comments</a:t>
             </a:r>
           </a:p>
         </p:txBody>
@@ -9617,7 +9614,7 @@
           <p:cNvPr id="4" name="Text Placeholder 3">
             <a:extLst>
               <a:ext uri="{FF2B5EF4-FFF2-40B4-BE49-F238E27FC236}">
-                <a16:creationId xmlns:a16="http://schemas.microsoft.com/office/drawing/2014/main" id="{1936A830-69E1-6415-5522-087CEA2D3181}"/>
+                <a16:creationId xmlns:a16="http://schemas.microsoft.com/office/drawing/2014/main" id="{1775B6E5-6180-95A7-5344-1BA8647571D7}"/>
               </a:ext>
             </a:extLst>
           </p:cNvPr>
@@ -9989,7 +9986,7 @@
             </a:pPr>
             <a:r>
               <a:rPr lang="en-IN" b="1" dirty="0"/>
-              <a:t>Clustered column chart→ horizontal bars are easier to read, it gives quick comparison across products.</a:t>
+              <a:t>Area chart→ This chart shows how many comments each channel got..</a:t>
             </a:r>
           </a:p>
           <a:p>
@@ -10000,7 +9997,7 @@
             </a:pPr>
             <a:r>
               <a:rPr lang="en-IN" b="1" dirty="0"/>
-              <a:t>Y axis: Channel title</a:t>
+              <a:t>Y axis: Channel id</a:t>
             </a:r>
           </a:p>
           <a:p>
@@ -10024,10 +10021,10 @@
       </p:sp>
       <p:pic>
         <p:nvPicPr>
-          <p:cNvPr id="5" name="Picture 4">
+          <p:cNvPr id="10" name="Picture 9">
             <a:extLst>
               <a:ext uri="{FF2B5EF4-FFF2-40B4-BE49-F238E27FC236}">
-                <a16:creationId xmlns:a16="http://schemas.microsoft.com/office/drawing/2014/main" id="{B3B33667-DE01-2E0D-B586-12251A51BAF0}"/>
+                <a16:creationId xmlns:a16="http://schemas.microsoft.com/office/drawing/2014/main" id="{39005801-E1C9-4E72-A81F-8AC6F3EC32E9}"/>
               </a:ext>
             </a:extLst>
           </p:cNvPr>
@@ -10044,8 +10041,8 @@
         </p:blipFill>
         <p:spPr>
           <a:xfrm>
-            <a:off x="7233796" y="1215736"/>
-            <a:ext cx="4958204" cy="3791441"/>
+            <a:off x="7086827" y="1438382"/>
+            <a:ext cx="4758969" cy="3698698"/>
           </a:xfrm>
           <a:prstGeom prst="rect">
             <a:avLst/>
@@ -10055,7 +10052,7 @@
     </p:spTree>
     <p:extLst>
       <p:ext uri="{BB962C8B-B14F-4D97-AF65-F5344CB8AC3E}">
-        <p14:creationId xmlns:p14="http://schemas.microsoft.com/office/powerpoint/2010/main" val="103385393"/>
+        <p14:creationId xmlns:p14="http://schemas.microsoft.com/office/powerpoint/2010/main" val="378101652"/>
       </p:ext>
     </p:extLst>
   </p:cSld>
@@ -10070,7 +10067,13 @@
   <p:cSld>
     <p:spTree>
       <p:nvGrpSpPr>
-        <p:cNvPr id="1" name=""/>
+        <p:cNvPr id="1" name="">
+          <a:extLst>
+            <a:ext uri="{FF2B5EF4-FFF2-40B4-BE49-F238E27FC236}">
+              <a16:creationId xmlns:a16="http://schemas.microsoft.com/office/drawing/2014/main" id="{F401EEB5-D785-E21F-DEB0-F786437773D0}"/>
+            </a:ext>
+          </a:extLst>
+        </p:cNvPr>
         <p:cNvGrpSpPr/>
         <p:nvPr/>
       </p:nvGrpSpPr>
@@ -10084,10 +10087,10 @@
       </p:grpSpPr>
       <p:sp>
         <p:nvSpPr>
-          <p:cNvPr id="2" name="Title 1">
+          <p:cNvPr id="3" name="Title 1">
             <a:extLst>
               <a:ext uri="{FF2B5EF4-FFF2-40B4-BE49-F238E27FC236}">
-                <a16:creationId xmlns:a16="http://schemas.microsoft.com/office/drawing/2014/main" id="{B00D219F-FC69-993D-123F-AC461522E3C3}"/>
+                <a16:creationId xmlns:a16="http://schemas.microsoft.com/office/drawing/2014/main" id="{45EDB57A-F2DD-1DC5-3DC5-D11C95AB718E}"/>
               </a:ext>
             </a:extLst>
           </p:cNvPr>
@@ -10098,49 +10101,401 @@
             <p:ph type="title"/>
           </p:nvPr>
         </p:nvSpPr>
-        <p:spPr/>
-        <p:txBody>
-          <a:bodyPr/>
+        <p:spPr>
+          <a:xfrm>
+            <a:off x="685800" y="1600200"/>
+            <a:ext cx="6629401" cy="696191"/>
+          </a:xfrm>
+        </p:spPr>
+        <p:txBody>
+          <a:bodyPr>
+            <a:normAutofit fontScale="90000"/>
+          </a:bodyPr>
           <a:lstStyle/>
           <a:p>
             <a:r>
               <a:rPr lang="en-IN" b="1" dirty="0">
                 <a:solidFill>
-                  <a:srgbClr val="FFC000"/>
+                  <a:schemeClr val="accent6">
+                    <a:lumMod val="60000"/>
+                    <a:lumOff val="40000"/>
+                  </a:schemeClr>
                 </a:solidFill>
               </a:rPr>
-              <a:t>Conclusion</a:t>
-            </a:r>
-          </a:p>
-        </p:txBody>
-      </p:sp>
-      <p:sp>
-        <p:nvSpPr>
-          <p:cNvPr id="3" name="Content Placeholder 2">
+              <a:t>Top-Performing Channel in terms of Comments</a:t>
+            </a:r>
+          </a:p>
+        </p:txBody>
+      </p:sp>
+      <p:sp>
+        <p:nvSpPr>
+          <p:cNvPr id="4" name="Text Placeholder 3">
             <a:extLst>
               <a:ext uri="{FF2B5EF4-FFF2-40B4-BE49-F238E27FC236}">
-                <a16:creationId xmlns:a16="http://schemas.microsoft.com/office/drawing/2014/main" id="{9F238E68-9F8A-506E-29B3-EE0470482069}"/>
+                <a16:creationId xmlns:a16="http://schemas.microsoft.com/office/drawing/2014/main" id="{1936A830-69E1-6415-5522-087CEA2D3181}"/>
               </a:ext>
             </a:extLst>
           </p:cNvPr>
-          <p:cNvSpPr>
-            <a:spLocks noGrp="1"/>
-          </p:cNvSpPr>
-          <p:nvPr>
-            <p:ph idx="1"/>
-          </p:nvPr>
+          <p:cNvSpPr txBox="1">
+            <a:spLocks/>
+          </p:cNvSpPr>
+          <p:nvPr/>
         </p:nvSpPr>
         <p:spPr>
           <a:xfrm>
-            <a:off x="1103312" y="1659988"/>
-            <a:ext cx="10375925" cy="4588411"/>
+            <a:off x="685801" y="2576945"/>
+            <a:ext cx="6629400" cy="3065319"/>
           </a:xfrm>
+          <a:prstGeom prst="rect">
+            <a:avLst/>
+          </a:prstGeom>
         </p:spPr>
         <p:txBody>
-          <a:bodyPr>
-            <a:normAutofit/>
-          </a:bodyPr>
-          <a:lstStyle/>
+          <a:bodyPr/>
+          <a:lstStyle>
+            <a:lvl1pPr marL="342900" indent="-306000" algn="l" defTabSz="457200" rtl="0" eaLnBrk="1" latinLnBrk="0" hangingPunct="1">
+              <a:spcBef>
+                <a:spcPct val="20000"/>
+              </a:spcBef>
+              <a:spcAft>
+                <a:spcPts val="600"/>
+              </a:spcAft>
+              <a:buClr>
+                <a:schemeClr val="tx2"/>
+              </a:buClr>
+              <a:buSzPct val="70000"/>
+              <a:buFont typeface="Wingdings 2" charset="2"/>
+              <a:buChar char=""/>
+              <a:defRPr sz="2000" kern="1200">
+                <a:ln>
+                  <a:solidFill>
+                    <a:schemeClr val="bg1">
+                      <a:lumMod val="75000"/>
+                      <a:lumOff val="25000"/>
+                      <a:alpha val="10000"/>
+                    </a:schemeClr>
+                  </a:solidFill>
+                </a:ln>
+                <a:solidFill>
+                  <a:schemeClr val="tx2"/>
+                </a:solidFill>
+                <a:effectLst>
+                  <a:outerShdw blurRad="9525" dist="25400" dir="14640000" algn="tl" rotWithShape="0">
+                    <a:schemeClr val="bg1">
+                      <a:alpha val="30000"/>
+                    </a:schemeClr>
+                  </a:outerShdw>
+                </a:effectLst>
+                <a:latin typeface="+mn-lt"/>
+                <a:ea typeface="+mn-ea"/>
+                <a:cs typeface="+mn-cs"/>
+              </a:defRPr>
+            </a:lvl1pPr>
+            <a:lvl2pPr marL="720000" indent="-270000" algn="l" defTabSz="457200" rtl="0" eaLnBrk="1" latinLnBrk="0" hangingPunct="1">
+              <a:spcBef>
+                <a:spcPct val="20000"/>
+              </a:spcBef>
+              <a:spcAft>
+                <a:spcPts val="600"/>
+              </a:spcAft>
+              <a:buClr>
+                <a:schemeClr val="tx2"/>
+              </a:buClr>
+              <a:buSzPct val="70000"/>
+              <a:buFont typeface="Wingdings 2" charset="2"/>
+              <a:buChar char=""/>
+              <a:defRPr sz="1800" kern="1200">
+                <a:ln>
+                  <a:solidFill>
+                    <a:schemeClr val="bg1">
+                      <a:lumMod val="75000"/>
+                      <a:lumOff val="25000"/>
+                      <a:alpha val="10000"/>
+                    </a:schemeClr>
+                  </a:solidFill>
+                </a:ln>
+                <a:solidFill>
+                  <a:schemeClr val="tx2"/>
+                </a:solidFill>
+                <a:effectLst>
+                  <a:outerShdw blurRad="9525" dist="25400" dir="14640000" algn="tl" rotWithShape="0">
+                    <a:schemeClr val="bg1">
+                      <a:alpha val="30000"/>
+                    </a:schemeClr>
+                  </a:outerShdw>
+                </a:effectLst>
+                <a:latin typeface="+mn-lt"/>
+                <a:ea typeface="+mn-ea"/>
+                <a:cs typeface="+mn-cs"/>
+              </a:defRPr>
+            </a:lvl2pPr>
+            <a:lvl3pPr marL="1026000" indent="-216000" algn="l" defTabSz="457200" rtl="0" eaLnBrk="1" latinLnBrk="0" hangingPunct="1">
+              <a:spcBef>
+                <a:spcPct val="20000"/>
+              </a:spcBef>
+              <a:spcAft>
+                <a:spcPts val="600"/>
+              </a:spcAft>
+              <a:buClr>
+                <a:schemeClr val="tx2"/>
+              </a:buClr>
+              <a:buSzPct val="70000"/>
+              <a:buFont typeface="Wingdings 2" charset="2"/>
+              <a:buChar char=""/>
+              <a:defRPr sz="1600" kern="1200">
+                <a:ln>
+                  <a:solidFill>
+                    <a:schemeClr val="bg1">
+                      <a:lumMod val="75000"/>
+                      <a:lumOff val="25000"/>
+                      <a:alpha val="10000"/>
+                    </a:schemeClr>
+                  </a:solidFill>
+                </a:ln>
+                <a:solidFill>
+                  <a:schemeClr val="tx2"/>
+                </a:solidFill>
+                <a:effectLst>
+                  <a:outerShdw blurRad="9525" dist="25400" dir="14640000" algn="tl" rotWithShape="0">
+                    <a:schemeClr val="bg1">
+                      <a:alpha val="30000"/>
+                    </a:schemeClr>
+                  </a:outerShdw>
+                </a:effectLst>
+                <a:latin typeface="+mn-lt"/>
+                <a:ea typeface="+mn-ea"/>
+                <a:cs typeface="+mn-cs"/>
+              </a:defRPr>
+            </a:lvl3pPr>
+            <a:lvl4pPr marL="1386000" indent="-216000" algn="l" defTabSz="457200" rtl="0" eaLnBrk="1" latinLnBrk="0" hangingPunct="1">
+              <a:spcBef>
+                <a:spcPct val="20000"/>
+              </a:spcBef>
+              <a:spcAft>
+                <a:spcPts val="600"/>
+              </a:spcAft>
+              <a:buClr>
+                <a:schemeClr val="tx2"/>
+              </a:buClr>
+              <a:buSzPct val="70000"/>
+              <a:buFont typeface="Wingdings 2" charset="2"/>
+              <a:buChar char=""/>
+              <a:defRPr sz="1400" kern="1200">
+                <a:ln>
+                  <a:solidFill>
+                    <a:schemeClr val="bg1">
+                      <a:lumMod val="75000"/>
+                      <a:lumOff val="25000"/>
+                      <a:alpha val="10000"/>
+                    </a:schemeClr>
+                  </a:solidFill>
+                </a:ln>
+                <a:solidFill>
+                  <a:schemeClr val="tx2"/>
+                </a:solidFill>
+                <a:effectLst>
+                  <a:outerShdw blurRad="9525" dist="25400" dir="14640000" algn="tl" rotWithShape="0">
+                    <a:schemeClr val="bg1">
+                      <a:alpha val="30000"/>
+                    </a:schemeClr>
+                  </a:outerShdw>
+                </a:effectLst>
+                <a:latin typeface="+mn-lt"/>
+                <a:ea typeface="+mn-ea"/>
+                <a:cs typeface="+mn-cs"/>
+              </a:defRPr>
+            </a:lvl4pPr>
+            <a:lvl5pPr marL="1674000" indent="-216000" algn="l" defTabSz="457200" rtl="0" eaLnBrk="1" latinLnBrk="0" hangingPunct="1">
+              <a:spcBef>
+                <a:spcPct val="20000"/>
+              </a:spcBef>
+              <a:spcAft>
+                <a:spcPts val="600"/>
+              </a:spcAft>
+              <a:buClr>
+                <a:schemeClr val="tx2"/>
+              </a:buClr>
+              <a:buSzPct val="70000"/>
+              <a:buFont typeface="Wingdings 2" charset="2"/>
+              <a:buChar char=""/>
+              <a:defRPr sz="1400" kern="1200">
+                <a:ln>
+                  <a:solidFill>
+                    <a:schemeClr val="bg1">
+                      <a:lumMod val="75000"/>
+                      <a:lumOff val="25000"/>
+                      <a:alpha val="10000"/>
+                    </a:schemeClr>
+                  </a:solidFill>
+                </a:ln>
+                <a:solidFill>
+                  <a:schemeClr val="tx2"/>
+                </a:solidFill>
+                <a:effectLst>
+                  <a:outerShdw blurRad="9525" dist="25400" dir="14640000" algn="tl" rotWithShape="0">
+                    <a:schemeClr val="bg1">
+                      <a:alpha val="30000"/>
+                    </a:schemeClr>
+                  </a:outerShdw>
+                </a:effectLst>
+                <a:latin typeface="+mn-lt"/>
+                <a:ea typeface="+mn-ea"/>
+                <a:cs typeface="+mn-cs"/>
+              </a:defRPr>
+            </a:lvl5pPr>
+            <a:lvl6pPr marL="2014600" indent="-228600" algn="l" defTabSz="457200" rtl="0" eaLnBrk="1" latinLnBrk="0" hangingPunct="1">
+              <a:spcBef>
+                <a:spcPct val="20000"/>
+              </a:spcBef>
+              <a:spcAft>
+                <a:spcPts val="600"/>
+              </a:spcAft>
+              <a:buClr>
+                <a:schemeClr val="tx2"/>
+              </a:buClr>
+              <a:buSzPct val="70000"/>
+              <a:buFont typeface="Wingdings 2" charset="2"/>
+              <a:buChar char=""/>
+              <a:defRPr sz="1400" kern="1200">
+                <a:ln>
+                  <a:solidFill>
+                    <a:schemeClr val="bg1">
+                      <a:lumMod val="75000"/>
+                      <a:lumOff val="25000"/>
+                      <a:alpha val="10000"/>
+                    </a:schemeClr>
+                  </a:solidFill>
+                </a:ln>
+                <a:solidFill>
+                  <a:schemeClr val="tx2"/>
+                </a:solidFill>
+                <a:effectLst>
+                  <a:outerShdw blurRad="9525" dist="25400" dir="14640000" algn="tl" rotWithShape="0">
+                    <a:schemeClr val="bg1">
+                      <a:alpha val="30000"/>
+                    </a:schemeClr>
+                  </a:outerShdw>
+                </a:effectLst>
+                <a:latin typeface="+mn-lt"/>
+                <a:ea typeface="+mn-ea"/>
+                <a:cs typeface="+mn-cs"/>
+              </a:defRPr>
+            </a:lvl6pPr>
+            <a:lvl7pPr marL="2401800" indent="-228600" algn="l" defTabSz="457200" rtl="0" eaLnBrk="1" latinLnBrk="0" hangingPunct="1">
+              <a:spcBef>
+                <a:spcPct val="20000"/>
+              </a:spcBef>
+              <a:spcAft>
+                <a:spcPts val="600"/>
+              </a:spcAft>
+              <a:buClr>
+                <a:schemeClr val="tx2"/>
+              </a:buClr>
+              <a:buSzPct val="70000"/>
+              <a:buFont typeface="Wingdings 2" charset="2"/>
+              <a:buChar char=""/>
+              <a:defRPr sz="1400" kern="1200">
+                <a:ln>
+                  <a:solidFill>
+                    <a:schemeClr val="bg1">
+                      <a:lumMod val="75000"/>
+                      <a:lumOff val="25000"/>
+                      <a:alpha val="10000"/>
+                    </a:schemeClr>
+                  </a:solidFill>
+                </a:ln>
+                <a:solidFill>
+                  <a:schemeClr val="tx2"/>
+                </a:solidFill>
+                <a:effectLst>
+                  <a:outerShdw blurRad="9525" dist="25400" dir="14640000" algn="tl" rotWithShape="0">
+                    <a:schemeClr val="bg1">
+                      <a:alpha val="30000"/>
+                    </a:schemeClr>
+                  </a:outerShdw>
+                </a:effectLst>
+                <a:latin typeface="+mn-lt"/>
+                <a:ea typeface="+mn-ea"/>
+                <a:cs typeface="+mn-cs"/>
+              </a:defRPr>
+            </a:lvl7pPr>
+            <a:lvl8pPr marL="2789000" indent="-228600" algn="l" defTabSz="457200" rtl="0" eaLnBrk="1" latinLnBrk="0" hangingPunct="1">
+              <a:spcBef>
+                <a:spcPct val="20000"/>
+              </a:spcBef>
+              <a:spcAft>
+                <a:spcPts val="600"/>
+              </a:spcAft>
+              <a:buClr>
+                <a:schemeClr val="tx2"/>
+              </a:buClr>
+              <a:buSzPct val="70000"/>
+              <a:buFont typeface="Wingdings 2" charset="2"/>
+              <a:buChar char=""/>
+              <a:defRPr sz="1400" kern="1200">
+                <a:ln>
+                  <a:solidFill>
+                    <a:schemeClr val="bg1">
+                      <a:lumMod val="75000"/>
+                      <a:lumOff val="25000"/>
+                      <a:alpha val="10000"/>
+                    </a:schemeClr>
+                  </a:solidFill>
+                </a:ln>
+                <a:solidFill>
+                  <a:schemeClr val="tx2"/>
+                </a:solidFill>
+                <a:effectLst>
+                  <a:outerShdw blurRad="9525" dist="25400" dir="14640000" algn="tl" rotWithShape="0">
+                    <a:schemeClr val="bg1">
+                      <a:alpha val="30000"/>
+                    </a:schemeClr>
+                  </a:outerShdw>
+                </a:effectLst>
+                <a:latin typeface="+mn-lt"/>
+                <a:ea typeface="+mn-ea"/>
+                <a:cs typeface="+mn-cs"/>
+              </a:defRPr>
+            </a:lvl8pPr>
+            <a:lvl9pPr marL="3106200" indent="-228600" algn="l" defTabSz="457200" rtl="0" eaLnBrk="1" latinLnBrk="0" hangingPunct="1">
+              <a:spcBef>
+                <a:spcPct val="20000"/>
+              </a:spcBef>
+              <a:spcAft>
+                <a:spcPts val="600"/>
+              </a:spcAft>
+              <a:buClr>
+                <a:schemeClr val="tx2"/>
+              </a:buClr>
+              <a:buSzPct val="70000"/>
+              <a:buFont typeface="Wingdings 2" charset="2"/>
+              <a:buChar char=""/>
+              <a:defRPr sz="1400" kern="1200">
+                <a:ln>
+                  <a:solidFill>
+                    <a:schemeClr val="bg1">
+                      <a:lumMod val="75000"/>
+                      <a:lumOff val="25000"/>
+                      <a:alpha val="10000"/>
+                    </a:schemeClr>
+                  </a:solidFill>
+                </a:ln>
+                <a:solidFill>
+                  <a:schemeClr val="tx2"/>
+                </a:solidFill>
+                <a:effectLst>
+                  <a:outerShdw blurRad="9525" dist="25400" dir="14640000" algn="tl" rotWithShape="0">
+                    <a:schemeClr val="bg1">
+                      <a:alpha val="30000"/>
+                    </a:schemeClr>
+                  </a:outerShdw>
+                </a:effectLst>
+                <a:latin typeface="+mn-lt"/>
+                <a:ea typeface="+mn-ea"/>
+                <a:cs typeface="+mn-cs"/>
+              </a:defRPr>
+            </a:lvl9pPr>
+          </a:lstStyle>
           <a:p>
             <a:pPr>
               <a:lnSpc>
@@ -10148,10 +10503,8 @@
               </a:lnSpc>
             </a:pPr>
             <a:r>
-              <a:rPr lang="en-US" b="1" dirty="0">
-                <a:latin typeface="+mj-lt"/>
-              </a:rPr>
-              <a:t>The YouTube Growth Analysis dashboard successfully transforms raw YouTube data into meaningful and interactive visual insights. By analyzing key performance indicators such as total views, likes, dislikes, comments, videos, and channels, the dashboard helps track channel growth, measure audience engagement, and compare video performance effectively.</a:t>
+              <a:rPr lang="en-IN" b="1" dirty="0"/>
+              <a:t>Clustered column chart→ horizontal bars are easier to read, it gives quick comparison across categories.</a:t>
             </a:r>
           </a:p>
           <a:p>
@@ -10161,21 +10514,63 @@
               </a:lnSpc>
             </a:pPr>
             <a:r>
-              <a:rPr lang="en-US" b="1" dirty="0">
-                <a:latin typeface="+mj-lt"/>
-              </a:rPr>
-              <a:t>Through proper data visualization techniques, creators and analysts can easily identify trends, understand audience preferences, and make data-driven content decisions. Overall, this project improves strategic planning and supports continuous channel growth in a competitive digital environment.</a:t>
-            </a:r>
-            <a:endParaRPr lang="en-IN" b="1" dirty="0">
-              <a:latin typeface="+mj-lt"/>
-            </a:endParaRPr>
-          </a:p>
-        </p:txBody>
-      </p:sp>
+              <a:rPr lang="en-IN" b="1" dirty="0"/>
+              <a:t>Y axis: Channel title</a:t>
+            </a:r>
+          </a:p>
+          <a:p>
+            <a:pPr>
+              <a:lnSpc>
+                <a:spcPct val="150000"/>
+              </a:lnSpc>
+            </a:pPr>
+            <a:r>
+              <a:rPr lang="en-IN" b="1" dirty="0"/>
+              <a:t>X axis: Total Comments </a:t>
+            </a:r>
+          </a:p>
+          <a:p>
+            <a:endParaRPr lang="en-IN" b="1" dirty="0"/>
+          </a:p>
+          <a:p>
+            <a:endParaRPr lang="en-IN" b="1" dirty="0"/>
+          </a:p>
+        </p:txBody>
+      </p:sp>
+      <p:pic>
+        <p:nvPicPr>
+          <p:cNvPr id="6" name="Picture 5">
+            <a:extLst>
+              <a:ext uri="{FF2B5EF4-FFF2-40B4-BE49-F238E27FC236}">
+                <a16:creationId xmlns:a16="http://schemas.microsoft.com/office/drawing/2014/main" id="{A7C18269-EA4D-41D5-91C4-654E3CBED8A3}"/>
+              </a:ext>
+            </a:extLst>
+          </p:cNvPr>
+          <p:cNvPicPr>
+            <a:picLocks noChangeAspect="1"/>
+          </p:cNvPicPr>
+          <p:nvPr/>
+        </p:nvPicPr>
+        <p:blipFill>
+          <a:blip r:embed="rId2"/>
+          <a:stretch>
+            <a:fillRect/>
+          </a:stretch>
+        </p:blipFill>
+        <p:spPr>
+          <a:xfrm>
+            <a:off x="7125798" y="1120131"/>
+            <a:ext cx="5066202" cy="3688175"/>
+          </a:xfrm>
+          <a:prstGeom prst="rect">
+            <a:avLst/>
+          </a:prstGeom>
+        </p:spPr>
+      </p:pic>
     </p:spTree>
     <p:extLst>
       <p:ext uri="{BB962C8B-B14F-4D97-AF65-F5344CB8AC3E}">
-        <p14:creationId xmlns:p14="http://schemas.microsoft.com/office/powerpoint/2010/main" val="663108152"/>
+        <p14:creationId xmlns:p14="http://schemas.microsoft.com/office/powerpoint/2010/main" val="103385393"/>
       </p:ext>
     </p:extLst>
   </p:cSld>
@@ -10347,6 +10742,126 @@
 </file>
 
 <file path=ppt/slides/slide20.xml><?xml version="1.0" encoding="utf-8"?>
+<p:sld xmlns:a="http://schemas.openxmlformats.org/drawingml/2006/main" xmlns:r="http://schemas.openxmlformats.org/officeDocument/2006/relationships" xmlns:p="http://schemas.openxmlformats.org/presentationml/2006/main">
+  <p:cSld>
+    <p:spTree>
+      <p:nvGrpSpPr>
+        <p:cNvPr id="1" name=""/>
+        <p:cNvGrpSpPr/>
+        <p:nvPr/>
+      </p:nvGrpSpPr>
+      <p:grpSpPr>
+        <a:xfrm>
+          <a:off x="0" y="0"/>
+          <a:ext cx="0" cy="0"/>
+          <a:chOff x="0" y="0"/>
+          <a:chExt cx="0" cy="0"/>
+        </a:xfrm>
+      </p:grpSpPr>
+      <p:sp>
+        <p:nvSpPr>
+          <p:cNvPr id="2" name="Title 1">
+            <a:extLst>
+              <a:ext uri="{FF2B5EF4-FFF2-40B4-BE49-F238E27FC236}">
+                <a16:creationId xmlns:a16="http://schemas.microsoft.com/office/drawing/2014/main" id="{B00D219F-FC69-993D-123F-AC461522E3C3}"/>
+              </a:ext>
+            </a:extLst>
+          </p:cNvPr>
+          <p:cNvSpPr>
+            <a:spLocks noGrp="1"/>
+          </p:cNvSpPr>
+          <p:nvPr>
+            <p:ph type="title"/>
+          </p:nvPr>
+        </p:nvSpPr>
+        <p:spPr/>
+        <p:txBody>
+          <a:bodyPr/>
+          <a:lstStyle/>
+          <a:p>
+            <a:r>
+              <a:rPr lang="en-IN" b="1" dirty="0">
+                <a:solidFill>
+                  <a:srgbClr val="FFC000"/>
+                </a:solidFill>
+              </a:rPr>
+              <a:t>Conclusion</a:t>
+            </a:r>
+          </a:p>
+        </p:txBody>
+      </p:sp>
+      <p:sp>
+        <p:nvSpPr>
+          <p:cNvPr id="3" name="Content Placeholder 2">
+            <a:extLst>
+              <a:ext uri="{FF2B5EF4-FFF2-40B4-BE49-F238E27FC236}">
+                <a16:creationId xmlns:a16="http://schemas.microsoft.com/office/drawing/2014/main" id="{9F238E68-9F8A-506E-29B3-EE0470482069}"/>
+              </a:ext>
+            </a:extLst>
+          </p:cNvPr>
+          <p:cNvSpPr>
+            <a:spLocks noGrp="1"/>
+          </p:cNvSpPr>
+          <p:nvPr>
+            <p:ph idx="1"/>
+          </p:nvPr>
+        </p:nvSpPr>
+        <p:spPr>
+          <a:xfrm>
+            <a:off x="1103312" y="1659988"/>
+            <a:ext cx="10375925" cy="4588411"/>
+          </a:xfrm>
+        </p:spPr>
+        <p:txBody>
+          <a:bodyPr>
+            <a:normAutofit/>
+          </a:bodyPr>
+          <a:lstStyle/>
+          <a:p>
+            <a:pPr>
+              <a:lnSpc>
+                <a:spcPct val="150000"/>
+              </a:lnSpc>
+            </a:pPr>
+            <a:r>
+              <a:rPr lang="en-US" b="1" dirty="0">
+                <a:latin typeface="+mj-lt"/>
+              </a:rPr>
+              <a:t>The YouTube Growth Analysis dashboard successfully transforms raw YouTube data into meaningful and interactive visual insights. By analyzing key performance indicators such as total views, likes, dislikes, comments, videos, and channels, the dashboard helps track channel growth, measure audience engagement, and compare video performance effectively.</a:t>
+            </a:r>
+          </a:p>
+          <a:p>
+            <a:pPr>
+              <a:lnSpc>
+                <a:spcPct val="150000"/>
+              </a:lnSpc>
+            </a:pPr>
+            <a:r>
+              <a:rPr lang="en-US" b="1" dirty="0">
+                <a:latin typeface="+mj-lt"/>
+              </a:rPr>
+              <a:t>Through proper data visualization techniques, creators and analysts can easily identify trends, understand audience preferences, and make data-driven content decisions. Overall, this project improves strategic planning and supports continuous channel growth in a competitive digital environment.</a:t>
+            </a:r>
+            <a:endParaRPr lang="en-IN" b="1" dirty="0">
+              <a:latin typeface="+mj-lt"/>
+            </a:endParaRPr>
+          </a:p>
+        </p:txBody>
+      </p:sp>
+    </p:spTree>
+    <p:extLst>
+      <p:ext uri="{BB962C8B-B14F-4D97-AF65-F5344CB8AC3E}">
+        <p14:creationId xmlns:p14="http://schemas.microsoft.com/office/powerpoint/2010/main" val="663108152"/>
+      </p:ext>
+    </p:extLst>
+  </p:cSld>
+  <p:clrMapOvr>
+    <a:masterClrMapping/>
+  </p:clrMapOvr>
+</p:sld>
+</file>
+
+<file path=ppt/slides/slide21.xml><?xml version="1.0" encoding="utf-8"?>
 <p:sld xmlns:a="http://schemas.openxmlformats.org/drawingml/2006/main" xmlns:r="http://schemas.openxmlformats.org/officeDocument/2006/relationships" xmlns:p="http://schemas.openxmlformats.org/presentationml/2006/main">
   <p:cSld>
     <p:spTree>
